--- a/第六週(10-15)/第六週_第3節_簡報.pptx
+++ b/第六週(10-15)/第六週_第3節_簡報.pptx
@@ -482,7 +482,7 @@
                 <a:ea typeface="Arial Unicode MS"/>
                 <a:cs typeface="Arial Unicode MS"/>
               </a:rPr>
-              <a:t>雷達兩顆、超音波兩顆、衛星兩顆、慣性兩顆</a:t>
+              <a:t>雷達兩顆、超音波兩顆、衛星兩顆、IMU 兩顆</a:t>
             </a:r>
             <a:r>
               <a:rPr sz="1200" lang="zh-TW" dirty="0">
@@ -559,7 +559,7 @@
                 <a:ea typeface="Arial Unicode MS"/>
                 <a:cs typeface="Arial Unicode MS"/>
               </a:rPr>
-              <a:t>後面兩張表問的問題不一樣。雷達和超音波問「看不看得到」；衛星問「知不知道自己在哪一道」；慣性問「衛星斷掉那幾秒撐不撐得住」。展開的那一塊會寫清楚這一格在問什麼。
+              <a:t>後面兩張表問的問題不一樣。雷達和超音波問「看不看得到」；衛星問「知不知道自己在哪一道」；IMU 問「衛星斷掉那幾秒撐不撐得住」。展開的那一塊會寫清楚這一格在問什麼。
 </a:t>
             </a:r>
           </a:p>
@@ -757,7 +757,7 @@
                 <a:ea typeface="Arial Unicode MS"/>
                 <a:cs typeface="Arial Unicode MS"/>
               </a:rPr>
-              <a:t>錯在把測距當成全部。一點六度到一百五十公尺攤成四點二公尺，比車道還寬。測得到遠，不等於知道在哪一道。
+              <a:t>錯在把測距當成全部。一點六度到一百五十公尺攤成四點二公尺，比車道還寬。測得到遠，不等於知道在哪一道，就像遠方的兩個頭燈，看得到，分不開。
 </a:t>
             </a:r>
           </a:p>
@@ -790,7 +790,7 @@
                 <a:ea typeface="Arial Unicode MS"/>
                 <a:cs typeface="Arial Unicode MS"/>
               </a:rPr>
-              <a:t>錯在用一個情境否定一種感測器。停車場時速五、兩公尺，它最便宜又夠用。每一種感測器各有自己的情境。
+              <a:t>錯在用一個情境否定一種感測器。停車場時速五、兩公尺，它最便宜又夠用。守門員不會進球，不代表球隊不需要守門員。
 </a:t>
             </a:r>
           </a:p>
@@ -823,7 +823,7 @@
                 <a:ea typeface="Arial Unicode MS"/>
                 <a:cs typeface="Arial Unicode MS"/>
               </a:rPr>
-              <a:t>錯在把機率讀成保證。CEP 是百分之五十，一半在圈內、一半在外。跟上週的「大於九成偵測機率」是同一種東西。
+              <a:t>錯在把機率讀成保證。CEP 是百分之五十，一半在圈內、一半在外，像射一百支飛鏢，有五十支在圈外。跟上週的「大於九成偵測機率」是同一種東西。
 </a:t>
             </a:r>
           </a:p>
@@ -856,7 +856,7 @@
                 <a:ea typeface="Arial Unicode MS"/>
                 <a:cs typeface="Arial Unicode MS"/>
               </a:rPr>
-              <a:t>錯在忘了它會飄。橫向誤差隨時間平方長，8 °/h 在時速八十只撐三十四秒，隧道要五百八十秒。
+              <a:t>錯在忘了它會飄。橫向誤差隨時間平方長，像閉著眼睛走路，愈走愈歪。8 °/h 在時速八十只撐三十四秒，隧道要五百八十秒。
 </a:t>
             </a:r>
           </a:p>
@@ -2011,7 +2011,7 @@
                 <a:ea typeface="Arial Unicode MS"/>
                 <a:cs typeface="Arial Unicode MS"/>
               </a:rPr>
-              <a:t>測距兩百五十公尺，門檻一百五十，綠的。可是角解析度那一行：一百五十公尺處一束攤成四點二公尺，比一個車道還寬，紅的。它知道前面一百五十公尺有車，說不出在你這一道還是隔壁。</a:t>
+              <a:t>測距兩百五十公尺，門檻一百五十，綠的。可是角解析度那一行：一百五十公尺處一束攤成四點二公尺，比一個車道還寬，紅的。它知道前面一百五十公尺有車，說不出在你這一道還是隔壁。就是第一節講的，晚上遠方來車，兩個頭燈黏成一盞：看得到，分不開。</a:t>
             </a:r>
             <a:r>
               <a:rPr sz="1200" b="1" lang="zh-TW" dirty="0">
@@ -2451,7 +2451,7 @@
                 <a:ea typeface="Arial Unicode MS"/>
                 <a:cs typeface="Arial Unicode MS"/>
               </a:rPr>
-              <a:t>最後想一題，不用寫：為什麼車用的要「可變頻率」，43 到 60 千赫？提示：車頭裝六顆，同時發聲。等一下我問。
+              <a:t>最後想一題，不用寫：為什麼車用的要「可變頻率」，43 到 60 千赫？提示：車頭裝六顆，同時發聲。想想第二節那六個在山谷裡同時喊的人。等一下我問。
 </a:t>
             </a:r>
           </a:p>
@@ -2803,7 +2803,7 @@
                 <a:ea typeface="Arial Unicode MS"/>
                 <a:cs typeface="Arial Unicode MS"/>
               </a:rPr>
-              <a:t>。同一顆模組，換個地方就從三公分變一點五公尺。這是今天最重要的一格，跟上週 OS1 換模式翻盤一樣重要——只是這次是往壞的方向翻。</a:t>
+              <a:t>。同一顆模組，換個地方就從三公分變一點五公尺。原因就是第二節的鏡子：訊號從大樓的牆上反射進來，接收機被騙了。這是今天最重要的一格，跟上週 OS1 換模式翻盤一樣重要——只是這次是往壞的方向翻。</a:t>
             </a:r>
             <a:r>
               <a:rPr sz="1200" b="1" lang="zh-TW" dirty="0">
@@ -3155,7 +3155,7 @@
                 <a:ea typeface="Arial Unicode MS"/>
                 <a:cs typeface="Arial Unicode MS"/>
               </a:rPr>
-              <a:t>時速五。ADIS 撐一百三十六秒，過；ICM 撐九秒，不過。想一下為什麼慢反而撐得久——算式裡有車速，同樣的航向誤差，車開得慢，橫向偏得就慢。
+              <a:t>時速五。ADIS 撐一百三十六秒，過；ICM 撐九秒，不過。想一下為什麼慢反而撐得久——算式裡有車速，同樣的航向誤差，車開得慢，橫向偏得就慢。閉著眼睛走路也一樣：同樣走十秒，慢慢走比用跑的偏得少。
 </a:t>
             </a:r>
           </a:p>
@@ -3363,11 +3363,11 @@
                 <a:spcPts val="0"/>
               </a:spcBef>
               <a:spcAft>
-                <a:spcPts val="200"/>
+                <a:spcPts val="150"/>
               </a:spcAft>
             </a:pPr>
             <a:r>
-              <a:rPr sz="1200" lang="zh-TW" dirty="0">
+              <a:rPr sz="900" lang="zh-TW" dirty="0">
                 <a:solidFill>
                   <a:srgbClr val="000000"/>
                 </a:solidFill>
@@ -3385,11 +3385,11 @@
                 <a:spcPts val="0"/>
               </a:spcBef>
               <a:spcAft>
-                <a:spcPts val="200"/>
+                <a:spcPts val="150"/>
               </a:spcAft>
             </a:pPr>
             <a:r>
-              <a:rPr sz="1200" lang="zh-TW" dirty="0">
+              <a:rPr sz="900" lang="zh-TW" dirty="0">
                 <a:solidFill>
                   <a:srgbClr val="000000"/>
                 </a:solidFill>
@@ -3400,7 +3400,7 @@
               <a:t>十二個型號、五個情境、六十格，兩週加起來各位做了三十四格。只有一顆五格全過：</a:t>
             </a:r>
             <a:r>
-              <a:rPr sz="1200" b="1" lang="zh-TW" dirty="0">
+              <a:rPr sz="900" b="1" lang="zh-TW" dirty="0">
                 <a:solidFill>
                   <a:srgbClr val="000000"/>
                 </a:solidFill>
@@ -3411,7 +3411,7 @@
               <a:t>ARS 548</a:t>
             </a:r>
             <a:r>
-              <a:rPr sz="1200" lang="zh-TW" dirty="0">
+              <a:rPr sz="900" lang="zh-TW" dirty="0">
                 <a:solidFill>
                   <a:srgbClr val="000000"/>
                 </a:solidFill>
@@ -3429,11 +3429,11 @@
                 <a:spcPts val="0"/>
               </a:spcBef>
               <a:spcAft>
-                <a:spcPts val="200"/>
+                <a:spcPts val="150"/>
               </a:spcAft>
             </a:pPr>
             <a:r>
-              <a:rPr sz="1200" lang="zh-TW" dirty="0">
+              <a:rPr sz="900" lang="zh-TW" dirty="0">
                 <a:solidFill>
                   <a:srgbClr val="000000"/>
                 </a:solidFill>
@@ -3451,11 +3451,11 @@
                 <a:spcPts val="0"/>
               </a:spcBef>
               <a:spcAft>
-                <a:spcPts val="200"/>
+                <a:spcPts val="150"/>
               </a:spcAft>
             </a:pPr>
             <a:r>
-              <a:rPr sz="1200" lang="zh-TW" dirty="0">
+              <a:rPr sz="900" lang="zh-TW" dirty="0">
                 <a:solidFill>
                   <a:srgbClr val="000000"/>
                 </a:solidFill>
@@ -3473,11 +3473,11 @@
                 <a:spcPts val="0"/>
               </a:spcBef>
               <a:spcAft>
-                <a:spcPts val="200"/>
+                <a:spcPts val="150"/>
               </a:spcAft>
             </a:pPr>
             <a:r>
-              <a:rPr sz="1200" b="1" lang="zh-TW" dirty="0">
+              <a:rPr sz="900" b="1" lang="zh-TW" dirty="0">
                 <a:solidFill>
                   <a:srgbClr val="000000"/>
                 </a:solidFill>
@@ -3488,7 +3488,7 @@
               <a:t>第一，它看不到「那是什麼」。</a:t>
             </a:r>
             <a:r>
-              <a:rPr sz="1200" lang="zh-TW" dirty="0">
+              <a:rPr sz="900" lang="zh-TW" dirty="0">
                 <a:solidFill>
                   <a:srgbClr val="000000"/>
                 </a:solidFill>
@@ -3506,11 +3506,11 @@
                 <a:spcPts val="0"/>
               </a:spcBef>
               <a:spcAft>
-                <a:spcPts val="200"/>
+                <a:spcPts val="150"/>
               </a:spcAft>
             </a:pPr>
             <a:r>
-              <a:rPr sz="1200" b="1" lang="zh-TW" dirty="0">
+              <a:rPr sz="900" b="1" lang="zh-TW" dirty="0">
                 <a:solidFill>
                   <a:srgbClr val="000000"/>
                 </a:solidFill>
@@ -3521,7 +3521,7 @@
               <a:t>第二，它不知道自己在哪。</a:t>
             </a:r>
             <a:r>
-              <a:rPr sz="1200" lang="zh-TW" dirty="0">
+              <a:rPr sz="900" lang="zh-TW" dirty="0">
                 <a:solidFill>
                   <a:srgbClr val="000000"/>
                 </a:solidFill>
@@ -3539,11 +3539,11 @@
                 <a:spcPts val="0"/>
               </a:spcBef>
               <a:spcAft>
-                <a:spcPts val="200"/>
+                <a:spcPts val="150"/>
               </a:spcAft>
             </a:pPr>
             <a:r>
-              <a:rPr sz="1200" b="1" lang="zh-TW" dirty="0">
+              <a:rPr sz="900" b="1" lang="zh-TW" dirty="0">
                 <a:solidFill>
                   <a:srgbClr val="000000"/>
                 </a:solidFill>
@@ -3554,7 +3554,7 @@
               <a:t>第三，隧道裡那九分鐘。</a:t>
             </a:r>
             <a:r>
-              <a:rPr sz="1200" lang="zh-TW" dirty="0">
+              <a:rPr sz="900" lang="zh-TW" dirty="0">
                 <a:solidFill>
                   <a:srgbClr val="000000"/>
                 </a:solidFill>
@@ -3572,11 +3572,11 @@
                 <a:spcPts val="0"/>
               </a:spcBef>
               <a:spcAft>
-                <a:spcPts val="200"/>
+                <a:spcPts val="150"/>
               </a:spcAft>
             </a:pPr>
             <a:r>
-              <a:rPr sz="1200" lang="zh-TW" dirty="0">
+              <a:rPr sz="900" lang="zh-TW" dirty="0">
                 <a:solidFill>
                   <a:srgbClr val="000000"/>
                 </a:solidFill>
@@ -3587,7 +3587,7 @@
               <a:t>所以第三週那張表，「每一種的弱點由哪一種來補」，今天每一格都有了真的型號：雷達補雨霧和速度，超音波補保險桿前面二十公分，衛星給絕對位置，IMU 補那幾秒。</a:t>
             </a:r>
             <a:r>
-              <a:rPr sz="1200" b="1" lang="zh-TW" dirty="0">
+              <a:rPr sz="900" b="1" lang="zh-TW" dirty="0">
                 <a:solidFill>
                   <a:srgbClr val="000000"/>
                 </a:solidFill>
@@ -3598,7 +3598,7 @@
               <a:t>沒有一顆是主角，每一顆都在補別人的洞。</a:t>
             </a:r>
             <a:r>
-              <a:rPr sz="1200" lang="zh-TW" dirty="0">
+              <a:rPr sz="900" lang="zh-TW" dirty="0">
                 <a:solidFill>
                   <a:srgbClr val="000000"/>
                 </a:solidFill>
@@ -3616,11 +3616,121 @@
                 <a:spcPts val="0"/>
               </a:spcBef>
               <a:spcAft>
-                <a:spcPts val="200"/>
+                <a:spcPts val="150"/>
               </a:spcAft>
             </a:pPr>
             <a:r>
-              <a:rPr sz="1200" lang="zh-TW" dirty="0">
+              <a:rPr sz="900" lang="zh-TW" dirty="0">
+                <a:solidFill>
+                  <a:srgbClr val="000000"/>
+                </a:solidFill>
+                <a:latin typeface="Arial Unicode MS"/>
+                <a:ea typeface="Arial Unicode MS"/>
+                <a:cs typeface="Arial Unicode MS"/>
+              </a:rPr>
+              <a:t>像一支足球隊：不會派十一個守門員上場，也不會派十一個前鋒。守門員最會擋球，可是不會進球。每個位置找最適合的人，合起來才是一支隊。
+</a:t>
+            </a:r>
+          </a:p>
+          <a:p>
+            <a:pPr algn="l">
+              <a:spcBef>
+                <a:spcPts val="0"/>
+              </a:spcBef>
+              <a:spcAft>
+                <a:spcPts val="150"/>
+              </a:spcAft>
+            </a:pPr>
+            <a:r>
+              <a:rPr sz="900" lang="zh-TW" dirty="0">
+                <a:solidFill>
+                  <a:srgbClr val="000000"/>
+                </a:solidFill>
+                <a:latin typeface="Arial Unicode MS"/>
+                <a:ea typeface="Arial Unicode MS"/>
+                <a:cs typeface="Arial Unicode MS"/>
+              </a:rPr>
+              <a:t>最後播一分鐘的影片，Waymo 的工程師講他們的車為什麼三種都裝。英文，畫面上有英文字幕。他說：相機有解析度和顏色；光達直接量出周圍的立體形狀；雷達穿得過霧和雨，還用都卜勒直接量速度，就是第一節那一張。</a:t>
+            </a:r>
+            <a:r>
+              <a:rPr sz="900" b="1" lang="zh-TW" dirty="0">
+                <a:solidFill>
+                  <a:srgbClr val="000000"/>
+                </a:solidFill>
+                <a:latin typeface="Arial Unicode MS"/>
+                <a:ea typeface="Arial Unicode MS"/>
+                <a:cs typeface="Arial Unicode MS"/>
+              </a:rPr>
+              <a:t>0:40</a:t>
+            </a:r>
+            <a:r>
+              <a:rPr sz="900" lang="zh-TW" dirty="0">
+                <a:solidFill>
+                  <a:srgbClr val="000000"/>
+                </a:solidFill>
+                <a:latin typeface="Arial Unicode MS"/>
+                <a:ea typeface="Arial Unicode MS"/>
+                <a:cs typeface="Arial Unicode MS"/>
+              </a:rPr>
+              <a:t> 他說這幾種感測器 </a:t>
+            </a:r>
+            <a:r>
+              <a:rPr sz="900" b="1" lang="zh-TW" dirty="0">
+                <a:solidFill>
+                  <a:srgbClr val="000000"/>
+                </a:solidFill>
+                <a:latin typeface="Arial Unicode MS"/>
+                <a:ea typeface="Arial Unicode MS"/>
+                <a:cs typeface="Arial Unicode MS"/>
+              </a:rPr>
+              <a:t>not backups to each other</a:t>
+            </a:r>
+            <a:r>
+              <a:rPr sz="900" lang="zh-TW" dirty="0">
+                <a:solidFill>
+                  <a:srgbClr val="000000"/>
+                </a:solidFill>
+                <a:latin typeface="Arial Unicode MS"/>
+                <a:ea typeface="Arial Unicode MS"/>
+                <a:cs typeface="Arial Unicode MS"/>
+              </a:rPr>
+              <a:t>，不是彼此的備胎，是合起來變成一張圖，比任何一顆單獨看都好。這就是足球隊。
+</a:t>
+            </a:r>
+          </a:p>
+          <a:p>
+            <a:pPr algn="l">
+              <a:spcBef>
+                <a:spcPts val="0"/>
+              </a:spcBef>
+              <a:spcAft>
+                <a:spcPts val="150"/>
+              </a:spcAft>
+            </a:pPr>
+            <a:r>
+              <a:rPr sz="900" lang="zh-TW" dirty="0">
+                <a:solidFill>
+                  <a:srgbClr val="000000"/>
+                </a:solidFill>
+                <a:latin typeface="Arial Unicode MS"/>
+                <a:ea typeface="Arial Unicode MS"/>
+                <a:cs typeface="Arial Unicode MS"/>
+              </a:rPr>
+              <a:t>影片只講這三種。播完問學生：今天的衛星和 IMU 如果也放上這輛車，它們補的是哪個洞？
+</a:t>
+            </a:r>
+          </a:p>
+          <a:p>
+            <a:pPr algn="l">
+              <a:spcBef>
+                <a:spcPts val="0"/>
+              </a:spcBef>
+              <a:spcAft>
+                <a:spcPts val="150"/>
+              </a:spcAft>
+            </a:pPr>
+            <a:r>
+              <a:rPr sz="900" lang="zh-TW" dirty="0">
                 <a:solidFill>
                   <a:srgbClr val="000000"/>
                 </a:solidFill>
@@ -4431,7 +4541,7 @@
                 <a:ea typeface="微軟正黑體" pitchFamily="34" charset="-122"/>
                 <a:cs typeface="微軟正黑體" pitchFamily="34" charset="-120"/>
               </a:rPr>
-              <a:t>替一台車選感測器（二）：雷達、超音波、衛星、慣性</a:t>
+              <a:t>替一台車選感測器（二）：雷達、超音波、衛星、IMU</a:t>
             </a:r>
             <a:endParaRPr lang="en-US" sz="2590" dirty="0"/>
           </a:p>
@@ -10674,7 +10784,7 @@
                 <a:ea typeface="微軟正黑體" pitchFamily="34" charset="-122"/>
                 <a:cs typeface="微軟正黑體" pitchFamily="34" charset="-120"/>
               </a:rPr>
-              <a:t>慣性兩顆 × 河內、停車場、隧道。然後替隧道寫一句結論。</a:t>
+              <a:t>IMU 兩顆 × 河內、停車場、隧道。然後替隧道寫一句結論。</a:t>
             </a:r>
             <a:endParaRPr lang="en-US" sz="2300" dirty="0"/>
           </a:p>
@@ -11345,11 +11455,11 @@
         <p:spPr>
           <a:xfrm>
             <a:off x="502920" y="1316736"/>
-            <a:ext cx="3566160" cy="2249424"/>
+            <a:ext cx="3566160" cy="2194560"/>
           </a:xfrm>
           <a:prstGeom prst="roundRect">
             <a:avLst>
-              <a:gd name="adj" fmla="val 4065"/>
+              <a:gd name="adj" fmla="val 4167"/>
             </a:avLst>
           </a:prstGeom>
           <a:solidFill>
@@ -11591,7 +11701,7 @@
         </p:nvSpPr>
         <p:spPr>
           <a:xfrm>
-            <a:off x="4187952" y="2295144"/>
+            <a:off x="4187952" y="2267712"/>
             <a:ext cx="768096" cy="292608"/>
           </a:xfrm>
           <a:prstGeom prst="rightArrow">
@@ -11611,7 +11721,7 @@
         </p:nvSpPr>
         <p:spPr>
           <a:xfrm flipH="1">
-            <a:off x="4370832" y="2240280"/>
+            <a:off x="4370832" y="2212848"/>
             <a:ext cx="402336" cy="402336"/>
           </a:xfrm>
           <a:prstGeom prst="line">
@@ -11634,7 +11744,7 @@
         </p:nvSpPr>
         <p:spPr>
           <a:xfrm>
-            <a:off x="4370832" y="2240280"/>
+            <a:off x="4370832" y="2212848"/>
             <a:ext cx="402336" cy="402336"/>
           </a:xfrm>
           <a:prstGeom prst="line">
@@ -11658,11 +11768,11 @@
         <p:spPr>
           <a:xfrm>
             <a:off x="5074920" y="1316736"/>
-            <a:ext cx="3566160" cy="2249424"/>
+            <a:ext cx="3566160" cy="2194560"/>
           </a:xfrm>
           <a:prstGeom prst="roundRect">
             <a:avLst>
-              <a:gd name="adj" fmla="val 4065"/>
+              <a:gd name="adj" fmla="val 4167"/>
             </a:avLst>
           </a:prstGeom>
           <a:solidFill>
@@ -12178,6 +12288,288 @@
         </p:nvSpPr>
         <p:spPr>
           <a:xfrm>
+            <a:off x="6255264" y="3529584"/>
+            <a:ext cx="2385816" cy="310896"/>
+          </a:xfrm>
+          <a:prstGeom prst="roundRect">
+            <a:avLst>
+              <a:gd name="adj" fmla="val 20588"/>
+            </a:avLst>
+          </a:prstGeom>
+          <a:solidFill>
+            <a:srgbClr val="EAF6F4"/>
+          </a:solidFill>
+          <a:ln w="9525">
+            <a:solidFill>
+              <a:srgbClr val="9FD6CE"/>
+            </a:solidFill>
+            <a:prstDash val="solid"/>
+          </a:ln>
+        </p:spPr>
+      </p:sp>
+      <p:sp>
+        <p:nvSpPr>
+          <p:cNvPr id="30" name="Text 28"/>
+          <p:cNvSpPr txBox="1"/>
+          <p:nvPr/>
+        </p:nvSpPr>
+        <p:spPr>
+          <a:xfrm>
+            <a:off x="6383280" y="3547872"/>
+            <a:ext cx="2202936" cy="274320"/>
+          </a:xfrm>
+          <a:prstGeom prst="rect">
+            <a:avLst/>
+          </a:prstGeom>
+          <a:noFill/>
+          <a:ln/>
+        </p:spPr>
+        <p:txBody>
+          <a:bodyPr wrap="square" lIns="0" tIns="0" rIns="0" bIns="0" rtlCol="0" anchor="ctr"/>
+          <a:lstStyle/>
+          <a:p>
+            <a:pPr indent="0" marL="0">
+              <a:lnSpc>
+                <a:spcPct val="100000"/>
+              </a:lnSpc>
+              <a:buNone/>
+            </a:pPr>
+            <a:r>
+              <a:rPr lang="en-US" sz="950" b="1" dirty="0">
+                <a:solidFill>
+                  <a:srgbClr val="007F72"/>
+                </a:solidFill>
+                <a:latin typeface="Arial" pitchFamily="34" charset="0"/>
+                <a:ea typeface="Arial" pitchFamily="34" charset="-122"/>
+                <a:cs typeface="Arial" pitchFamily="34" charset="-120"/>
+              </a:rPr>
+              <a:t>Ví dụ · </a:t>
+            </a:r>
+            <a:pPr indent="0" marL="0">
+              <a:lnSpc>
+                <a:spcPct val="100000"/>
+              </a:lnSpc>
+              <a:buNone/>
+            </a:pPr>
+            <a:r>
+              <a:rPr lang="en-US" sz="950" dirty="0">
+                <a:solidFill>
+                  <a:srgbClr val="1A2733"/>
+                </a:solidFill>
+                <a:latin typeface="Arial" pitchFamily="34" charset="0"/>
+                <a:ea typeface="Arial" pitchFamily="34" charset="-122"/>
+                <a:cs typeface="Arial" pitchFamily="34" charset="-120"/>
+              </a:rPr>
+              <a:t>đội bóng không xếp 11 thủ môn</a:t>
+            </a:r>
+            <a:endParaRPr lang="en-US" sz="950" dirty="0"/>
+          </a:p>
+          <a:p>
+            <a:pPr indent="0" marL="0">
+              <a:lnSpc>
+                <a:spcPct val="100000"/>
+              </a:lnSpc>
+              <a:buNone/>
+            </a:pPr>
+            <a:r>
+              <a:rPr lang="en-US" sz="900" b="1" dirty="0">
+                <a:solidFill>
+                  <a:srgbClr val="007F72"/>
+                </a:solidFill>
+                <a:latin typeface="微軟正黑體" pitchFamily="34" charset="0"/>
+                <a:ea typeface="微軟正黑體" pitchFamily="34" charset="-122"/>
+                <a:cs typeface="微軟正黑體" pitchFamily="34" charset="-120"/>
+              </a:rPr>
+              <a:t>例子・</a:t>
+            </a:r>
+            <a:pPr indent="0" marL="0">
+              <a:lnSpc>
+                <a:spcPct val="100000"/>
+              </a:lnSpc>
+              <a:buNone/>
+            </a:pPr>
+            <a:r>
+              <a:rPr lang="en-US" sz="900" dirty="0">
+                <a:solidFill>
+                  <a:srgbClr val="5F7183"/>
+                </a:solidFill>
+                <a:latin typeface="微軟正黑體" pitchFamily="34" charset="0"/>
+                <a:ea typeface="微軟正黑體" pitchFamily="34" charset="-122"/>
+                <a:cs typeface="微軟正黑體" pitchFamily="34" charset="-120"/>
+              </a:rPr>
+              <a:t>足球隊不會派十一個守門員</a:t>
+            </a:r>
+            <a:endParaRPr lang="en-US" sz="950" dirty="0"/>
+          </a:p>
+        </p:txBody>
+      </p:sp>
+      <p:sp>
+        <p:nvSpPr>
+          <p:cNvPr id="31" name="Shape 29"/>
+          <p:cNvSpPr/>
+          <p:nvPr/>
+        </p:nvSpPr>
+        <p:spPr>
+          <a:xfrm>
+            <a:off x="539496" y="3575304"/>
+            <a:ext cx="219456" cy="219456"/>
+          </a:xfrm>
+          <a:prstGeom prst="ellipse">
+            <a:avLst/>
+          </a:prstGeom>
+          <a:solidFill>
+            <a:srgbClr val="D9463E"/>
+          </a:solidFill>
+          <a:ln/>
+        </p:spPr>
+      </p:sp>
+      <p:sp>
+        <p:nvSpPr>
+          <p:cNvPr id="32" name="Text 30"/>
+          <p:cNvSpPr txBox="1"/>
+          <p:nvPr/>
+        </p:nvSpPr>
+        <p:spPr>
+          <a:xfrm>
+            <a:off x="539496" y="3602736"/>
+            <a:ext cx="219456" cy="164592"/>
+          </a:xfrm>
+          <a:prstGeom prst="rect">
+            <a:avLst/>
+          </a:prstGeom>
+          <a:noFill/>
+          <a:ln/>
+        </p:spPr>
+        <p:txBody>
+          <a:bodyPr wrap="square" lIns="0" tIns="0" rIns="0" bIns="0" rtlCol="0" anchor="ctr"/>
+          <a:lstStyle/>
+          <a:p>
+            <a:pPr algn="ctr" indent="0" marL="0">
+              <a:buNone/>
+            </a:pPr>
+            <a:r>
+              <a:rPr lang="en-US" sz="750" b="1" dirty="0">
+                <a:solidFill>
+                  <a:srgbClr val="FFFFFF"/>
+                </a:solidFill>
+                <a:latin typeface="Arial" pitchFamily="34" charset="0"/>
+                <a:ea typeface="Arial" pitchFamily="34" charset="-122"/>
+                <a:cs typeface="Arial" pitchFamily="34" charset="-120"/>
+              </a:rPr>
+              <a:t>▶</a:t>
+            </a:r>
+            <a:endParaRPr lang="en-US" sz="750" dirty="0"/>
+          </a:p>
+        </p:txBody>
+      </p:sp>
+      <p:sp>
+        <p:nvSpPr>
+          <p:cNvPr id="33" name="Text 31"/>
+          <p:cNvSpPr txBox="1"/>
+          <p:nvPr/>
+        </p:nvSpPr>
+        <p:spPr>
+          <a:xfrm>
+            <a:off x="832104" y="3529584"/>
+            <a:ext cx="5240280" cy="310896"/>
+          </a:xfrm>
+          <a:prstGeom prst="rect">
+            <a:avLst/>
+          </a:prstGeom>
+          <a:noFill/>
+          <a:ln/>
+        </p:spPr>
+        <p:txBody>
+          <a:bodyPr wrap="square" lIns="0" tIns="0" rIns="0" bIns="0" rtlCol="0" anchor="ctr"/>
+          <a:lstStyle/>
+          <a:p>
+            <a:pPr indent="0" marL="0">
+              <a:lnSpc>
+                <a:spcPct val="100000"/>
+              </a:lnSpc>
+              <a:buNone/>
+            </a:pPr>
+            <a:r>
+              <a:rPr lang="en-US" sz="850" b="1" u="sng" dirty="0">
+                <a:solidFill>
+                  <a:srgbClr val="0B1F3A"/>
+                </a:solidFill>
+                <a:latin typeface="Arial" pitchFamily="34" charset="0"/>
+                <a:ea typeface="Arial" pitchFamily="34" charset="-122"/>
+                <a:cs typeface="Arial" pitchFamily="34" charset="-120"/>
+                <a:hlinkClick r:id="rId1" invalidUrl="" action="" tgtFrame="" tooltip="" history="1" highlightClick="0" endSnd="0">
+                  <a:extLst>
+                    <a:ext uri="{A12FA001-AC4F-418D-AE19-62706E023703}">
+                      <ahyp:hlinkClr xmlns:ahyp="http://schemas.microsoft.com/office/drawing/2018/hyperlinkcolor" val="tx"/>
+                    </a:ext>
+                  </a:extLst>
+                </a:hlinkClick>
+              </a:rPr>
+              <a:t>Video: vì sao Waymo dùng cả camera, lidar, radar　1:03</a:t>
+            </a:r>
+            <a:endParaRPr lang="en-US" sz="850" dirty="0"/>
+          </a:p>
+          <a:p>
+            <a:pPr indent="0" marL="0">
+              <a:lnSpc>
+                <a:spcPct val="100000"/>
+              </a:lnSpc>
+              <a:buNone/>
+            </a:pPr>
+            <a:r>
+              <a:rPr lang="en-US" sz="850" b="1" u="sng" dirty="0">
+                <a:solidFill>
+                  <a:srgbClr val="0B1F3A"/>
+                </a:solidFill>
+                <a:latin typeface="微軟正黑體" pitchFamily="34" charset="0"/>
+                <a:ea typeface="微軟正黑體" pitchFamily="34" charset="-122"/>
+                <a:cs typeface="微軟正黑體" pitchFamily="34" charset="-120"/>
+                <a:hlinkClick r:id="rId1" invalidUrl="" action="" tgtFrame="" tooltip="" history="1" highlightClick="0" endSnd="0">
+                  <a:extLst>
+                    <a:ext uri="{A12FA001-AC4F-418D-AE19-62706E023703}">
+                      <ahyp:hlinkClr xmlns:ahyp="http://schemas.microsoft.com/office/drawing/2018/hyperlinkcolor" val="tx"/>
+                    </a:ext>
+                  </a:extLst>
+                </a:hlinkClick>
+              </a:rPr>
+              <a:t>影片：Waymo 為什麼三種都用　</a:t>
+            </a:r>
+            <a:pPr indent="0" marL="0">
+              <a:lnSpc>
+                <a:spcPct val="100000"/>
+              </a:lnSpc>
+              <a:buNone/>
+            </a:pPr>
+            <a:r>
+              <a:rPr lang="en-US" sz="850" u="sng" dirty="0">
+                <a:solidFill>
+                  <a:srgbClr val="1F6FBF"/>
+                </a:solidFill>
+                <a:latin typeface="Arial" pitchFamily="34" charset="0"/>
+                <a:ea typeface="Arial" pitchFamily="34" charset="-122"/>
+                <a:cs typeface="Arial" pitchFamily="34" charset="-120"/>
+                <a:hlinkClick r:id="rId1" invalidUrl="" action="" tgtFrame="" tooltip="" history="1" highlightClick="0" endSnd="0">
+                  <a:extLst>
+                    <a:ext uri="{A12FA001-AC4F-418D-AE19-62706E023703}">
+                      <ahyp:hlinkClr xmlns:ahyp="http://schemas.microsoft.com/office/drawing/2018/hyperlinkcolor" val="tx"/>
+                    </a:ext>
+                  </a:extLst>
+                </a:hlinkClick>
+              </a:rPr>
+              <a:t>youtu.be/Vwrz1hfVeSM</a:t>
+            </a:r>
+            <a:endParaRPr lang="en-US" sz="850" dirty="0"/>
+          </a:p>
+        </p:txBody>
+      </p:sp>
+      <p:sp>
+        <p:nvSpPr>
+          <p:cNvPr id="34" name="Shape 32"/>
+          <p:cNvSpPr/>
+          <p:nvPr/>
+        </p:nvSpPr>
+        <p:spPr>
+          <a:xfrm>
             <a:off x="502920" y="3913632"/>
             <a:ext cx="8138160" cy="603504"/>
           </a:xfrm>
@@ -12199,7 +12591,7 @@
       </p:sp>
       <p:sp>
         <p:nvSpPr>
-          <p:cNvPr id="30" name="Text 28"/>
+          <p:cNvPr id="35" name="Text 33"/>
           <p:cNvSpPr txBox="1"/>
           <p:nvPr/>
         </p:nvSpPr>
@@ -12261,14 +12653,14 @@
       </p:sp>
       <p:pic>
         <p:nvPicPr>
-          <p:cNvPr id="32" name="Image 0" descr="/Users/tsengchenghsun/Class/carClass/Claude outputs/第六週(10-15)/src/logo.png">    </p:cNvPr>
+          <p:cNvPr id="37" name="Image 0" descr="/Users/tsengchenghsun/Class/carClass/Claude outputs/第六週(10-15)/src/logo.png">    </p:cNvPr>
           <p:cNvPicPr>
             <a:picLocks noChangeAspect="1"/>
           </p:cNvPicPr>
           <p:nvPr/>
         </p:nvPicPr>
         <p:blipFill>
-          <a:blip r:embed="rId1"/>
+          <a:blip r:embed="rId2"/>
           <a:stretch>
             <a:fillRect/>
           </a:stretch>
@@ -12285,7 +12677,7 @@
       </p:pic>
       <p:sp>
         <p:nvSpPr>
-          <p:cNvPr id="33" name="Text 29"/>
+          <p:cNvPr id="38" name="Text 34"/>
           <p:cNvSpPr txBox="1"/>
           <p:nvPr/>
         </p:nvSpPr>
@@ -12324,7 +12716,7 @@
       </p:sp>
       <p:sp>
         <p:nvSpPr>
-          <p:cNvPr id="34" name="Text 30"/>
+          <p:cNvPr id="39" name="Text 35"/>
           <p:cNvSpPr txBox="1"/>
           <p:nvPr/>
         </p:nvSpPr>

--- a/第六週(10-15)/第六週_第3節_簡報.pptx
+++ b/第六週(10-15)/第六週_第3節_簡報.pptx
@@ -823,7 +823,7 @@
                 <a:ea typeface="Arial Unicode MS"/>
                 <a:cs typeface="Arial Unicode MS"/>
               </a:rPr>
-              <a:t>錯在把機率讀成保證。CEP 是百分之五十，一半在圈內、一半在外，像射一百支飛鏢，有五十支在圈外。跟上週的「大於九成偵測機率」是同一種東西。
+              <a:t>錯在把機率讀成保證。CEP 是百分之五十，一半在圈內、一半在外，像射一百支飛鏢，有五十支在圈外，大多只是稍微出界。跟上週的「大於九成偵測機率」是同一種東西。
 </a:t>
             </a:r>
           </a:p>
@@ -2363,7 +2363,7 @@
                 <a:ea typeface="Arial Unicode MS"/>
                 <a:cs typeface="Arial Unicode MS"/>
               </a:rPr>
-              <a:t>時速二十，煞停四點二公尺加餘裕五公尺，九點二公尺。五點五公尺搆不到。</a:t>
+              <a:t>校園的條件是要在</a:t>
             </a:r>
             <a:r>
               <a:rPr sz="1200" b="1" lang="zh-TW" dirty="0">
@@ -2374,7 +2374,7 @@
                 <a:ea typeface="Arial Unicode MS"/>
                 <a:cs typeface="Arial Unicode MS"/>
               </a:rPr>
-              <a:t>把這兩個煞停距離抄下來</a:t>
+              <a:t>四十公尺</a:t>
             </a:r>
             <a:r>
               <a:rPr sz="1200" lang="zh-TW" dirty="0">
@@ -2385,7 +2385,29 @@
                 <a:ea typeface="Arial Unicode MS"/>
                 <a:cs typeface="Arial Unicode MS"/>
               </a:rPr>
-              <a:t>，零點四和四點二，差在這裡。
+              <a:t>外認出行人，所以判定上的測距門檻是四十公尺。就算不管那個行人，只算煞停：時速二十，煞停四點二公尺加餘裕五公尺，九點二公尺，五點五公尺也搆不到。</a:t>
+            </a:r>
+            <a:r>
+              <a:rPr sz="1200" b="1" lang="zh-TW" dirty="0">
+                <a:solidFill>
+                  <a:srgbClr val="000000"/>
+                </a:solidFill>
+                <a:latin typeface="Arial Unicode MS"/>
+                <a:ea typeface="Arial Unicode MS"/>
+                <a:cs typeface="Arial Unicode MS"/>
+              </a:rPr>
+              <a:t>把兩個門檻抄下來</a:t>
+            </a:r>
+            <a:r>
+              <a:rPr sz="1200" lang="zh-TW" dirty="0">
+                <a:solidFill>
+                  <a:srgbClr val="000000"/>
+                </a:solidFill>
+                <a:latin typeface="Arial Unicode MS"/>
+                <a:ea typeface="Arial Unicode MS"/>
+                <a:cs typeface="Arial Unicode MS"/>
+              </a:rPr>
+              <a:t>，兩公尺和四十公尺，差在這裡。
 </a:t>
             </a:r>
           </a:p>
@@ -2429,7 +2451,7 @@
                 <a:ea typeface="Arial Unicode MS"/>
                 <a:cs typeface="Arial Unicode MS"/>
               </a:rPr>
-              <a:t>：HC-SR04 寫十五度，兩公尺處只蓋零點五公尺寬，所以保險桿要裝四到六顆。Bosch 那一行寫「規格表上沒有這一行」——那份是售後市場的規格單，沒印。抄下來。
+              <a:t>：停車場那一格，HC-SR04 寫十五度，兩公尺處只蓋零點五公尺寬，所以保險桿要裝四到六顆。校園那一格寫「超過它的測距，用不上」。Bosch 那一行寫「規格表上沒有這一行」——那份是售後市場的規格單，沒印。抄下來。
 </a:t>
             </a:r>
           </a:p>
@@ -3903,7 +3925,7 @@
                 <a:ea typeface="Arial Unicode MS"/>
                 <a:cs typeface="Arial Unicode MS"/>
               </a:rPr>
-              <a:t>第二句：超音波量不到 5 公尺以外的東西，所以它沒有用。
+              <a:t>第二句：超音波量不到 6 公尺以外的東西，所以它沒有用。
 </a:t>
             </a:r>
           </a:p>
@@ -9266,7 +9288,7 @@
                 <a:ea typeface="Arial" pitchFamily="34" charset="-122"/>
                 <a:cs typeface="Arial" pitchFamily="34" charset="-120"/>
               </a:rPr>
-              <a:t>Hai siêu âm × bãi đỗ xe, sân trường. Bốn ô — chỉ khác tốc độ.</a:t>
+              <a:t>Hai siêu âm × bãi đỗ xe, sân trường. Bốn ô — khác ở tốc độ và khoảng cách cần thấy.</a:t>
             </a:r>
             <a:endParaRPr lang="en-US" sz="2300" dirty="0"/>
           </a:p>
@@ -9286,7 +9308,7 @@
                 <a:ea typeface="微軟正黑體" pitchFamily="34" charset="-122"/>
                 <a:cs typeface="微軟正黑體" pitchFamily="34" charset="-120"/>
               </a:rPr>
-              <a:t>超音波兩顆 × 停車場、校園。四格——只差在車速。</a:t>
+              <a:t>超音波兩顆 × 停車場、校園。四格——差在車速和要看多遠。</a:t>
             </a:r>
             <a:endParaRPr lang="en-US" sz="2300" dirty="0"/>
           </a:p>
@@ -9409,7 +9431,7 @@
                 <a:ea typeface="Arial" pitchFamily="34" charset="-122"/>
                 <a:cs typeface="Arial" pitchFamily="34" charset="-120"/>
               </a:rPr>
-              <a:t>Bãi đỗ xe cả hai qua, sân trường cả hai không: khác ở quãng đường phanh — chép hai con số</a:t>
+              <a:t>Bãi đỗ xe cả hai qua, sân trường cả hai không: chép hai ngưỡng tầm đo — 2 m và 40 m</a:t>
             </a:r>
             <a:endParaRPr lang="en-US" sz="1250" dirty="0"/>
           </a:p>
@@ -9429,7 +9451,7 @@
                 <a:ea typeface="微軟正黑體" pitchFamily="34" charset="-122"/>
                 <a:cs typeface="微軟正黑體" pitchFamily="34" charset="-120"/>
               </a:rPr>
-              <a:t>停車場兩顆都過，校園兩顆都不過：差在煞停距離——抄下兩個數字</a:t>
+              <a:t>停車場兩顆都過，校園兩顆都不過：抄下兩個測距門檻——2 公尺和 40 公尺</a:t>
             </a:r>
             <a:endParaRPr lang="en-US" sz="1250" dirty="0"/>
           </a:p>
@@ -9757,7 +9779,7 @@
                 <a:ea typeface="Arial" pitchFamily="34" charset="-122"/>
                 <a:cs typeface="Arial" pitchFamily="34" charset="-120"/>
               </a:rPr>
-              <a:t>Ở 20 km/h phanh 4,2 m cộng 5 m dự phòng = 9,2 m; nó thấy xa nhất 5,5 m.</a:t>
+              <a:t>Sân trường phải thấy người ở 40 m; nó xa nhất chỉ 5,5 m.</a:t>
             </a:r>
             <a:endParaRPr lang="en-US" sz="1250" dirty="0"/>
           </a:p>
@@ -9777,7 +9799,7 @@
                 <a:ea typeface="微軟正黑體" pitchFamily="34" charset="-122"/>
                 <a:cs typeface="微軟正黑體" pitchFamily="34" charset="-120"/>
               </a:rPr>
-              <a:t>時速 20 煞停 4.2 加餘裕 5 ＝ 9.2 公尺；它最遠看 5.5。</a:t>
+              <a:t>校園要在 40 公尺外看到行人；它最遠只看 5.5 公尺。</a:t>
             </a:r>
             <a:endParaRPr lang="en-US" sz="1250" dirty="0"/>
           </a:p>
@@ -13193,7 +13215,7 @@
                 <a:ea typeface="Arial" pitchFamily="34" charset="-122"/>
                 <a:cs typeface="Arial" pitchFamily="34" charset="-120"/>
               </a:rPr>
-              <a:t>② Siêu âm không đo được quá 5 m, nên nó vô dụng.</a:t>
+              <a:t>② Siêu âm không đo được quá 6 m, nên nó vô dụng.</a:t>
             </a:r>
             <a:endParaRPr lang="en-US" sz="1250" dirty="0"/>
           </a:p>
@@ -13213,7 +13235,7 @@
                 <a:ea typeface="微軟正黑體" pitchFamily="34" charset="-122"/>
                 <a:cs typeface="微軟正黑體" pitchFamily="34" charset="-120"/>
               </a:rPr>
-              <a:t>② 超音波量不到 5 公尺以外的東西，所以它沒有用。</a:t>
+              <a:t>② 超音波量不到 6 公尺以外的東西，所以它沒有用。</a:t>
             </a:r>
             <a:endParaRPr lang="en-US" sz="1250" dirty="0"/>
           </a:p>

--- a/第六週(10-15)/第六週_第3節_簡報.pptx
+++ b/第六週(10-15)/第六週_第3節_簡報.pptx
@@ -2649,7 +2649,51 @@
                 <a:ea typeface="Arial Unicode MS"/>
                 <a:cs typeface="Arial Unicode MS"/>
               </a:rPr>
-              <a:t>開闊天空，RTK 鎖得住：一公分，加上離基準站二十公里、每公里一公釐，兩公分，一共三公分。
+              <a:t>先複習 RTK 是什麼：英文是 Real-Time Kinematic，中文叫</a:t>
+            </a:r>
+            <a:r>
+              <a:rPr sz="1200" b="1" lang="zh-TW" dirty="0">
+                <a:solidFill>
+                  <a:srgbClr val="000000"/>
+                </a:solidFill>
+                <a:latin typeface="Arial Unicode MS"/>
+                <a:ea typeface="Arial Unicode MS"/>
+                <a:cs typeface="Arial Unicode MS"/>
+              </a:rPr>
+              <a:t>即時動態定位</a:t>
+            </a:r>
+            <a:r>
+              <a:rPr sz="1200" lang="zh-TW" dirty="0">
+                <a:solidFill>
+                  <a:srgbClr val="000000"/>
+                </a:solidFill>
+                <a:latin typeface="Arial Unicode MS"/>
+                <a:ea typeface="Arial Unicode MS"/>
+                <a:cs typeface="Arial Unicode MS"/>
+              </a:rPr>
+              <a:t>，第二節第八張講過。附近有一座位置早就量好的</a:t>
+            </a:r>
+            <a:r>
+              <a:rPr sz="1200" b="1" lang="zh-TW" dirty="0">
+                <a:solidFill>
+                  <a:srgbClr val="000000"/>
+                </a:solidFill>
+                <a:latin typeface="Arial Unicode MS"/>
+                <a:ea typeface="Arial Unicode MS"/>
+                <a:cs typeface="Arial Unicode MS"/>
+              </a:rPr>
+              <a:t>基準站</a:t>
+            </a:r>
+            <a:r>
+              <a:rPr sz="1200" lang="zh-TW" dirty="0">
+                <a:solidFill>
+                  <a:srgbClr val="000000"/>
+                </a:solidFill>
+                <a:latin typeface="Arial Unicode MS"/>
+                <a:ea typeface="Arial Unicode MS"/>
+                <a:cs typeface="Arial Unicode MS"/>
+              </a:rPr>
+              <a:t>，它也收同樣的衛星，知道自己算出來差多少，把這個差從網路送給車子，車子扣掉就從公尺級變成公分級，就像有人拿著準的手錶告訴全班「教室的鐘快五分鐘」。校園天空開闊，RTK 鎖得住：一公分，加上離基準站二十公里、每公里一公釐，兩公分，一共三公分。
 </a:t>
             </a:r>
           </a:p>
@@ -2704,7 +2748,7 @@
                 <a:ea typeface="Arial Unicode MS"/>
                 <a:cs typeface="Arial Unicode MS"/>
               </a:rPr>
-              <a:t>同一顆模組，換個地方就從三公分變一點五公尺。原因就是第二節的鏡子：訊號從大樓的牆上反射進來，走了遠路，接收機被騙了。這是今天最重要的一格，跟上週 OS1 換模式翻盤一樣，只是這次往壞的方向翻。
+              <a:t>失鎖的意思是：RTK 要一直穩穩追著衛星的訊號，訊號被大樓反射打亂，就追丟了，只剩沒有修正的單機解。同一顆模組，換個地方就從三公分變一點五公尺。原因就是第二節的鏡子：訊號從大樓的牆上反射進來，走了遠路，接收機被騙了。這是今天最重要的一格，跟上週 OS1 換模式翻盤一樣，只是這次往壞的方向翻。
 </a:t>
             </a:r>
           </a:p>
